--- a/paper/manuscript-05182026/Figures.pptx
+++ b/paper/manuscript-05182026/Figures.pptx
@@ -3376,10 +3376,10 @@
       </p:grpSpPr>
       <p:grpSp>
         <p:nvGrpSpPr>
-          <p:cNvPr id="4" name="Group 3">
-            <a:extLst>
-              <a:ext uri="{FF2B5EF4-FFF2-40B4-BE49-F238E27FC236}">
-                <a16:creationId xmlns:a16="http://schemas.microsoft.com/office/drawing/2014/main" id="{B6115D57-D254-5D1B-8D9F-D70604411652}"/>
+          <p:cNvPr id="9" name="Group 8">
+            <a:extLst>
+              <a:ext uri="{FF2B5EF4-FFF2-40B4-BE49-F238E27FC236}">
+                <a16:creationId xmlns:a16="http://schemas.microsoft.com/office/drawing/2014/main" id="{FBCFF8C2-E1FB-4DAF-B2C0-AF40F9C9F3A4}"/>
               </a:ext>
             </a:extLst>
           </p:cNvPr>
@@ -3396,10 +3396,10 @@
         </p:grpSpPr>
         <p:grpSp>
           <p:nvGrpSpPr>
-            <p:cNvPr id="33" name="Group 32">
+            <p:cNvPr id="4" name="Group 3">
               <a:extLst>
                 <a:ext uri="{FF2B5EF4-FFF2-40B4-BE49-F238E27FC236}">
-                  <a16:creationId xmlns:a16="http://schemas.microsoft.com/office/drawing/2014/main" id="{22B979C5-3CFC-7CDF-0D32-DBF487B57610}"/>
+                  <a16:creationId xmlns:a16="http://schemas.microsoft.com/office/drawing/2014/main" id="{B6115D57-D254-5D1B-8D9F-D70604411652}"/>
                 </a:ext>
               </a:extLst>
             </p:cNvPr>
@@ -3414,103 +3414,485 @@
               <a:chExt cx="11785307" cy="5337042"/>
             </a:xfrm>
           </p:grpSpPr>
-          <p:pic>
-            <p:nvPicPr>
-              <p:cNvPr id="7" name="Picture 6">
+          <p:grpSp>
+            <p:nvGrpSpPr>
+              <p:cNvPr id="33" name="Group 32">
                 <a:extLst>
                   <a:ext uri="{FF2B5EF4-FFF2-40B4-BE49-F238E27FC236}">
-                    <a16:creationId xmlns:a16="http://schemas.microsoft.com/office/drawing/2014/main" id="{DDFCA68E-FE5C-ECEC-6336-4C15E6DFF3E3}"/>
+                    <a16:creationId xmlns:a16="http://schemas.microsoft.com/office/drawing/2014/main" id="{22B979C5-3CFC-7CDF-0D32-DBF487B57610}"/>
                   </a:ext>
                 </a:extLst>
               </p:cNvPr>
-              <p:cNvPicPr>
-                <a:picLocks noChangeAspect="1"/>
-              </p:cNvPicPr>
+              <p:cNvGrpSpPr/>
               <p:nvPr/>
-            </p:nvPicPr>
-            <p:blipFill>
-              <a:blip r:embed="rId2"/>
-              <a:srcRect l="4237" t="2705" r="5193" b="9696"/>
-              <a:stretch>
-                <a:fillRect/>
-              </a:stretch>
-            </p:blipFill>
-            <p:spPr>
+            </p:nvGrpSpPr>
+            <p:grpSpPr>
               <a:xfrm>
-                <a:off x="35792" y="809676"/>
-                <a:ext cx="3767769" cy="4858977"/>
+                <a:off x="35792" y="501899"/>
+                <a:ext cx="11785307" cy="5337042"/>
+                <a:chOff x="35792" y="501899"/>
+                <a:chExt cx="11785307" cy="5337042"/>
               </a:xfrm>
-              <a:prstGeom prst="rect">
-                <a:avLst/>
-              </a:prstGeom>
-            </p:spPr>
-          </p:pic>
+            </p:grpSpPr>
+            <p:pic>
+              <p:nvPicPr>
+                <p:cNvPr id="7" name="Picture 6">
+                  <a:extLst>
+                    <a:ext uri="{FF2B5EF4-FFF2-40B4-BE49-F238E27FC236}">
+                      <a16:creationId xmlns:a16="http://schemas.microsoft.com/office/drawing/2014/main" id="{DDFCA68E-FE5C-ECEC-6336-4C15E6DFF3E3}"/>
+                    </a:ext>
+                  </a:extLst>
+                </p:cNvPr>
+                <p:cNvPicPr>
+                  <a:picLocks noChangeAspect="1"/>
+                </p:cNvPicPr>
+                <p:nvPr/>
+              </p:nvPicPr>
+              <p:blipFill>
+                <a:blip r:embed="rId2"/>
+                <a:srcRect l="4237" t="2705" r="5193" b="9696"/>
+                <a:stretch>
+                  <a:fillRect/>
+                </a:stretch>
+              </p:blipFill>
+              <p:spPr>
+                <a:xfrm>
+                  <a:off x="35792" y="809676"/>
+                  <a:ext cx="3767769" cy="4858977"/>
+                </a:xfrm>
+                <a:prstGeom prst="rect">
+                  <a:avLst/>
+                </a:prstGeom>
+              </p:spPr>
+            </p:pic>
+            <p:pic>
+              <p:nvPicPr>
+                <p:cNvPr id="19" name="Picture 18">
+                  <a:extLst>
+                    <a:ext uri="{FF2B5EF4-FFF2-40B4-BE49-F238E27FC236}">
+                      <a16:creationId xmlns:a16="http://schemas.microsoft.com/office/drawing/2014/main" id="{E7E6877E-D1F8-86E4-D04A-0CA4938FCA7C}"/>
+                    </a:ext>
+                  </a:extLst>
+                </p:cNvPr>
+                <p:cNvPicPr>
+                  <a:picLocks noChangeAspect="1"/>
+                </p:cNvPicPr>
+                <p:nvPr/>
+              </p:nvPicPr>
+              <p:blipFill>
+                <a:blip r:embed="rId3"/>
+                <a:stretch>
+                  <a:fillRect/>
+                </a:stretch>
+              </p:blipFill>
+              <p:spPr>
+                <a:xfrm>
+                  <a:off x="9665367" y="2807857"/>
+                  <a:ext cx="2127938" cy="2999094"/>
+                </a:xfrm>
+                <a:prstGeom prst="rect">
+                  <a:avLst/>
+                </a:prstGeom>
+              </p:spPr>
+            </p:pic>
+            <p:pic>
+              <p:nvPicPr>
+                <p:cNvPr id="21" name="Picture 20">
+                  <a:extLst>
+                    <a:ext uri="{FF2B5EF4-FFF2-40B4-BE49-F238E27FC236}">
+                      <a16:creationId xmlns:a16="http://schemas.microsoft.com/office/drawing/2014/main" id="{A3316F8B-4F10-4429-9FFA-6E320C3D644A}"/>
+                    </a:ext>
+                  </a:extLst>
+                </p:cNvPr>
+                <p:cNvPicPr>
+                  <a:picLocks noChangeAspect="1"/>
+                </p:cNvPicPr>
+                <p:nvPr/>
+              </p:nvPicPr>
+              <p:blipFill>
+                <a:blip r:embed="rId4"/>
+                <a:srcRect b="4471"/>
+                <a:stretch>
+                  <a:fillRect/>
+                </a:stretch>
+              </p:blipFill>
+              <p:spPr>
+                <a:xfrm>
+                  <a:off x="9665367" y="738149"/>
+                  <a:ext cx="2130458" cy="2050419"/>
+                </a:xfrm>
+                <a:prstGeom prst="rect">
+                  <a:avLst/>
+                </a:prstGeom>
+              </p:spPr>
+            </p:pic>
+            <p:sp>
+              <p:nvSpPr>
+                <p:cNvPr id="22" name="TextBox 21">
+                  <a:extLst>
+                    <a:ext uri="{FF2B5EF4-FFF2-40B4-BE49-F238E27FC236}">
+                      <a16:creationId xmlns:a16="http://schemas.microsoft.com/office/drawing/2014/main" id="{6F4FF86A-A17E-B9D7-ABE0-BE6F2E719FFE}"/>
+                    </a:ext>
+                  </a:extLst>
+                </p:cNvPr>
+                <p:cNvSpPr txBox="1"/>
+                <p:nvPr/>
+              </p:nvSpPr>
+              <p:spPr>
+                <a:xfrm>
+                  <a:off x="108485" y="501899"/>
+                  <a:ext cx="290464" cy="307777"/>
+                </a:xfrm>
+                <a:prstGeom prst="rect">
+                  <a:avLst/>
+                </a:prstGeom>
+                <a:noFill/>
+              </p:spPr>
+              <p:txBody>
+                <a:bodyPr wrap="none" rtlCol="0">
+                  <a:spAutoFit/>
+                </a:bodyPr>
+                <a:lstStyle/>
+                <a:p>
+                  <a:r>
+                    <a:rPr lang="en-US" sz="1400" dirty="0"/>
+                    <a:t>A</a:t>
+                  </a:r>
+                </a:p>
+              </p:txBody>
+            </p:sp>
+            <p:sp>
+              <p:nvSpPr>
+                <p:cNvPr id="23" name="TextBox 22">
+                  <a:extLst>
+                    <a:ext uri="{FF2B5EF4-FFF2-40B4-BE49-F238E27FC236}">
+                      <a16:creationId xmlns:a16="http://schemas.microsoft.com/office/drawing/2014/main" id="{EA7D42A7-6CFF-DE1C-F2E6-804F3B56CD16}"/>
+                    </a:ext>
+                  </a:extLst>
+                </p:cNvPr>
+                <p:cNvSpPr txBox="1"/>
+                <p:nvPr/>
+              </p:nvSpPr>
+              <p:spPr>
+                <a:xfrm>
+                  <a:off x="3769644" y="501899"/>
+                  <a:ext cx="293670" cy="307777"/>
+                </a:xfrm>
+                <a:prstGeom prst="rect">
+                  <a:avLst/>
+                </a:prstGeom>
+                <a:noFill/>
+              </p:spPr>
+              <p:txBody>
+                <a:bodyPr wrap="none" rtlCol="0">
+                  <a:spAutoFit/>
+                </a:bodyPr>
+                <a:lstStyle/>
+                <a:p>
+                  <a:r>
+                    <a:rPr lang="en-US" sz="1400" dirty="0"/>
+                    <a:t>B</a:t>
+                  </a:r>
+                </a:p>
+              </p:txBody>
+            </p:sp>
+            <p:sp>
+              <p:nvSpPr>
+                <p:cNvPr id="25" name="Rectangle 24">
+                  <a:extLst>
+                    <a:ext uri="{FF2B5EF4-FFF2-40B4-BE49-F238E27FC236}">
+                      <a16:creationId xmlns:a16="http://schemas.microsoft.com/office/drawing/2014/main" id="{CCA6A6E0-06CB-0A23-1A07-F45483887B4F}"/>
+                    </a:ext>
+                  </a:extLst>
+                </p:cNvPr>
+                <p:cNvSpPr/>
+                <p:nvPr/>
+              </p:nvSpPr>
+              <p:spPr>
+                <a:xfrm>
+                  <a:off x="101895" y="517792"/>
+                  <a:ext cx="3613494" cy="5321148"/>
+                </a:xfrm>
+                <a:prstGeom prst="rect">
+                  <a:avLst/>
+                </a:prstGeom>
+                <a:noFill/>
+                <a:ln>
+                  <a:solidFill>
+                    <a:schemeClr val="bg1">
+                      <a:lumMod val="85000"/>
+                    </a:schemeClr>
+                  </a:solidFill>
+                  <a:prstDash val="dash"/>
+                </a:ln>
+              </p:spPr>
+              <p:style>
+                <a:lnRef idx="2">
+                  <a:schemeClr val="accent1">
+                    <a:shade val="15000"/>
+                  </a:schemeClr>
+                </a:lnRef>
+                <a:fillRef idx="1">
+                  <a:schemeClr val="accent1"/>
+                </a:fillRef>
+                <a:effectRef idx="0">
+                  <a:schemeClr val="accent1"/>
+                </a:effectRef>
+                <a:fontRef idx="minor">
+                  <a:schemeClr val="lt1"/>
+                </a:fontRef>
+              </p:style>
+              <p:txBody>
+                <a:bodyPr rtlCol="0" anchor="ctr"/>
+                <a:lstStyle/>
+                <a:p>
+                  <a:pPr algn="ctr"/>
+                  <a:endParaRPr lang="en-US"/>
+                </a:p>
+              </p:txBody>
+            </p:sp>
+            <p:sp>
+              <p:nvSpPr>
+                <p:cNvPr id="26" name="Rectangle 25">
+                  <a:extLst>
+                    <a:ext uri="{FF2B5EF4-FFF2-40B4-BE49-F238E27FC236}">
+                      <a16:creationId xmlns:a16="http://schemas.microsoft.com/office/drawing/2014/main" id="{BD6673FD-C4E1-A0BD-6064-705E553102FC}"/>
+                    </a:ext>
+                  </a:extLst>
+                </p:cNvPr>
+                <p:cNvSpPr/>
+                <p:nvPr/>
+              </p:nvSpPr>
+              <p:spPr>
+                <a:xfrm>
+                  <a:off x="3756874" y="517792"/>
+                  <a:ext cx="5836695" cy="2346959"/>
+                </a:xfrm>
+                <a:prstGeom prst="rect">
+                  <a:avLst/>
+                </a:prstGeom>
+                <a:noFill/>
+                <a:ln>
+                  <a:solidFill>
+                    <a:schemeClr val="bg1">
+                      <a:lumMod val="85000"/>
+                    </a:schemeClr>
+                  </a:solidFill>
+                  <a:prstDash val="dash"/>
+                </a:ln>
+              </p:spPr>
+              <p:style>
+                <a:lnRef idx="2">
+                  <a:schemeClr val="accent1">
+                    <a:shade val="15000"/>
+                  </a:schemeClr>
+                </a:lnRef>
+                <a:fillRef idx="1">
+                  <a:schemeClr val="accent1"/>
+                </a:fillRef>
+                <a:effectRef idx="0">
+                  <a:schemeClr val="accent1"/>
+                </a:effectRef>
+                <a:fontRef idx="minor">
+                  <a:schemeClr val="lt1"/>
+                </a:fontRef>
+              </p:style>
+              <p:txBody>
+                <a:bodyPr rtlCol="0" anchor="ctr"/>
+                <a:lstStyle/>
+                <a:p>
+                  <a:pPr algn="ctr"/>
+                  <a:endParaRPr lang="en-US"/>
+                </a:p>
+              </p:txBody>
+            </p:sp>
+            <p:sp>
+              <p:nvSpPr>
+                <p:cNvPr id="27" name="Rectangle 26">
+                  <a:extLst>
+                    <a:ext uri="{FF2B5EF4-FFF2-40B4-BE49-F238E27FC236}">
+                      <a16:creationId xmlns:a16="http://schemas.microsoft.com/office/drawing/2014/main" id="{C0F7E0AE-72F5-5F2A-1138-993DE8554C5F}"/>
+                    </a:ext>
+                  </a:extLst>
+                </p:cNvPr>
+                <p:cNvSpPr/>
+                <p:nvPr/>
+              </p:nvSpPr>
+              <p:spPr>
+                <a:xfrm>
+                  <a:off x="3756873" y="2903824"/>
+                  <a:ext cx="5836695" cy="2935117"/>
+                </a:xfrm>
+                <a:prstGeom prst="rect">
+                  <a:avLst/>
+                </a:prstGeom>
+                <a:noFill/>
+                <a:ln>
+                  <a:solidFill>
+                    <a:schemeClr val="bg1">
+                      <a:lumMod val="85000"/>
+                    </a:schemeClr>
+                  </a:solidFill>
+                  <a:prstDash val="dash"/>
+                </a:ln>
+              </p:spPr>
+              <p:style>
+                <a:lnRef idx="2">
+                  <a:schemeClr val="accent1">
+                    <a:shade val="15000"/>
+                  </a:schemeClr>
+                </a:lnRef>
+                <a:fillRef idx="1">
+                  <a:schemeClr val="accent1"/>
+                </a:fillRef>
+                <a:effectRef idx="0">
+                  <a:schemeClr val="accent1"/>
+                </a:effectRef>
+                <a:fontRef idx="minor">
+                  <a:schemeClr val="lt1"/>
+                </a:fontRef>
+              </p:style>
+              <p:txBody>
+                <a:bodyPr rtlCol="0" anchor="ctr"/>
+                <a:lstStyle/>
+                <a:p>
+                  <a:pPr algn="ctr"/>
+                  <a:endParaRPr lang="en-US"/>
+                </a:p>
+              </p:txBody>
+            </p:sp>
+            <p:sp>
+              <p:nvSpPr>
+                <p:cNvPr id="28" name="TextBox 27">
+                  <a:extLst>
+                    <a:ext uri="{FF2B5EF4-FFF2-40B4-BE49-F238E27FC236}">
+                      <a16:creationId xmlns:a16="http://schemas.microsoft.com/office/drawing/2014/main" id="{28F3054E-6DD1-01CE-0EFF-8EF255066B23}"/>
+                    </a:ext>
+                  </a:extLst>
+                </p:cNvPr>
+                <p:cNvSpPr txBox="1"/>
+                <p:nvPr/>
+              </p:nvSpPr>
+              <p:spPr>
+                <a:xfrm>
+                  <a:off x="3769644" y="2925282"/>
+                  <a:ext cx="309700" cy="307777"/>
+                </a:xfrm>
+                <a:prstGeom prst="rect">
+                  <a:avLst/>
+                </a:prstGeom>
+                <a:noFill/>
+              </p:spPr>
+              <p:txBody>
+                <a:bodyPr wrap="none" rtlCol="0">
+                  <a:spAutoFit/>
+                </a:bodyPr>
+                <a:lstStyle/>
+                <a:p>
+                  <a:r>
+                    <a:rPr lang="en-US" sz="1400" dirty="0"/>
+                    <a:t>C</a:t>
+                  </a:r>
+                </a:p>
+              </p:txBody>
+            </p:sp>
+            <p:sp>
+              <p:nvSpPr>
+                <p:cNvPr id="29" name="Rectangle 28">
+                  <a:extLst>
+                    <a:ext uri="{FF2B5EF4-FFF2-40B4-BE49-F238E27FC236}">
+                      <a16:creationId xmlns:a16="http://schemas.microsoft.com/office/drawing/2014/main" id="{EB6ABCBF-362E-1AFC-40C7-20E7592AB048}"/>
+                    </a:ext>
+                  </a:extLst>
+                </p:cNvPr>
+                <p:cNvSpPr/>
+                <p:nvPr/>
+              </p:nvSpPr>
+              <p:spPr>
+                <a:xfrm>
+                  <a:off x="9635054" y="517792"/>
+                  <a:ext cx="2186045" cy="5321148"/>
+                </a:xfrm>
+                <a:prstGeom prst="rect">
+                  <a:avLst/>
+                </a:prstGeom>
+                <a:noFill/>
+                <a:ln>
+                  <a:solidFill>
+                    <a:schemeClr val="bg1">
+                      <a:lumMod val="85000"/>
+                    </a:schemeClr>
+                  </a:solidFill>
+                  <a:prstDash val="dash"/>
+                </a:ln>
+              </p:spPr>
+              <p:style>
+                <a:lnRef idx="2">
+                  <a:schemeClr val="accent1">
+                    <a:shade val="15000"/>
+                  </a:schemeClr>
+                </a:lnRef>
+                <a:fillRef idx="1">
+                  <a:schemeClr val="accent1"/>
+                </a:fillRef>
+                <a:effectRef idx="0">
+                  <a:schemeClr val="accent1"/>
+                </a:effectRef>
+                <a:fontRef idx="minor">
+                  <a:schemeClr val="lt1"/>
+                </a:fontRef>
+              </p:style>
+              <p:txBody>
+                <a:bodyPr rtlCol="0" anchor="ctr"/>
+                <a:lstStyle/>
+                <a:p>
+                  <a:pPr algn="ctr"/>
+                  <a:endParaRPr lang="en-US"/>
+                </a:p>
+              </p:txBody>
+            </p:sp>
+            <p:sp>
+              <p:nvSpPr>
+                <p:cNvPr id="30" name="TextBox 29">
+                  <a:extLst>
+                    <a:ext uri="{FF2B5EF4-FFF2-40B4-BE49-F238E27FC236}">
+                      <a16:creationId xmlns:a16="http://schemas.microsoft.com/office/drawing/2014/main" id="{CF239376-22FE-C990-7CA4-0AA9A0A34E67}"/>
+                    </a:ext>
+                  </a:extLst>
+                </p:cNvPr>
+                <p:cNvSpPr txBox="1"/>
+                <p:nvPr/>
+              </p:nvSpPr>
+              <p:spPr>
+                <a:xfrm>
+                  <a:off x="9644368" y="501899"/>
+                  <a:ext cx="308098" cy="307777"/>
+                </a:xfrm>
+                <a:prstGeom prst="rect">
+                  <a:avLst/>
+                </a:prstGeom>
+                <a:noFill/>
+              </p:spPr>
+              <p:txBody>
+                <a:bodyPr wrap="none" rtlCol="0">
+                  <a:spAutoFit/>
+                </a:bodyPr>
+                <a:lstStyle/>
+                <a:p>
+                  <a:r>
+                    <a:rPr lang="en-US" sz="1400" dirty="0"/>
+                    <a:t>D</a:t>
+                  </a:r>
+                </a:p>
+              </p:txBody>
+            </p:sp>
+          </p:grpSp>
           <p:pic>
             <p:nvPicPr>
-              <p:cNvPr id="10" name="Picture 9">
+              <p:cNvPr id="3" name="Picture 2">
                 <a:extLst>
                   <a:ext uri="{FF2B5EF4-FFF2-40B4-BE49-F238E27FC236}">
-                    <a16:creationId xmlns:a16="http://schemas.microsoft.com/office/drawing/2014/main" id="{1CA01127-A439-2EF3-BD84-A1668A7E9BAA}"/>
-                  </a:ext>
-                </a:extLst>
-              </p:cNvPr>
-              <p:cNvPicPr>
-                <a:picLocks noChangeAspect="1"/>
-              </p:cNvPicPr>
-              <p:nvPr/>
-            </p:nvPicPr>
-            <p:blipFill>
-              <a:blip r:embed="rId3"/>
-              <a:stretch>
-                <a:fillRect/>
-              </a:stretch>
-            </p:blipFill>
-            <p:spPr>
-              <a:xfrm>
-                <a:off x="3770475" y="848749"/>
-                <a:ext cx="3029417" cy="1954880"/>
-              </a:xfrm>
-              <a:prstGeom prst="rect">
-                <a:avLst/>
-              </a:prstGeom>
-            </p:spPr>
-          </p:pic>
-          <p:pic>
-            <p:nvPicPr>
-              <p:cNvPr id="12" name="Picture 11">
-                <a:extLst>
-                  <a:ext uri="{FF2B5EF4-FFF2-40B4-BE49-F238E27FC236}">
-                    <a16:creationId xmlns:a16="http://schemas.microsoft.com/office/drawing/2014/main" id="{864F54D2-D4B2-7B10-9F3B-47133D20DC61}"/>
-                  </a:ext>
-                </a:extLst>
-              </p:cNvPr>
-              <p:cNvPicPr>
-                <a:picLocks noChangeAspect="1"/>
-              </p:cNvPicPr>
-              <p:nvPr/>
-            </p:nvPicPr>
-            <p:blipFill>
-              <a:blip r:embed="rId4"/>
-              <a:stretch>
-                <a:fillRect/>
-              </a:stretch>
-            </p:blipFill>
-            <p:spPr>
-              <a:xfrm>
-                <a:off x="6801340" y="844793"/>
-                <a:ext cx="2796384" cy="1954880"/>
-              </a:xfrm>
-              <a:prstGeom prst="rect">
-                <a:avLst/>
-              </a:prstGeom>
-            </p:spPr>
-          </p:pic>
-          <p:pic>
-            <p:nvPicPr>
-              <p:cNvPr id="19" name="Picture 18">
-                <a:extLst>
-                  <a:ext uri="{FF2B5EF4-FFF2-40B4-BE49-F238E27FC236}">
-                    <a16:creationId xmlns:a16="http://schemas.microsoft.com/office/drawing/2014/main" id="{E7E6877E-D1F8-86E4-D04A-0CA4938FCA7C}"/>
+                    <a16:creationId xmlns:a16="http://schemas.microsoft.com/office/drawing/2014/main" id="{E77945B6-AC6E-3B02-5239-9E39F9580F69}"/>
                   </a:ext>
                 </a:extLst>
               </p:cNvPr>
@@ -3527,412 +3909,51 @@
             </p:blipFill>
             <p:spPr>
               <a:xfrm>
-                <a:off x="9665367" y="2807857"/>
-                <a:ext cx="2127938" cy="2999094"/>
+                <a:off x="3816332" y="3233059"/>
+                <a:ext cx="5723904" cy="2483958"/>
               </a:xfrm>
               <a:prstGeom prst="rect">
                 <a:avLst/>
               </a:prstGeom>
             </p:spPr>
           </p:pic>
-          <p:pic>
-            <p:nvPicPr>
-              <p:cNvPr id="21" name="Picture 20">
-                <a:extLst>
-                  <a:ext uri="{FF2B5EF4-FFF2-40B4-BE49-F238E27FC236}">
-                    <a16:creationId xmlns:a16="http://schemas.microsoft.com/office/drawing/2014/main" id="{A3316F8B-4F10-4429-9FFA-6E320C3D644A}"/>
-                  </a:ext>
-                </a:extLst>
-              </p:cNvPr>
-              <p:cNvPicPr>
-                <a:picLocks noChangeAspect="1"/>
-              </p:cNvPicPr>
-              <p:nvPr/>
-            </p:nvPicPr>
-            <p:blipFill>
-              <a:blip r:embed="rId6"/>
-              <a:srcRect b="4471"/>
-              <a:stretch>
-                <a:fillRect/>
-              </a:stretch>
-            </p:blipFill>
-            <p:spPr>
-              <a:xfrm>
-                <a:off x="9665367" y="738149"/>
-                <a:ext cx="2130458" cy="2050419"/>
-              </a:xfrm>
-              <a:prstGeom prst="rect">
-                <a:avLst/>
-              </a:prstGeom>
-            </p:spPr>
-          </p:pic>
-          <p:sp>
-            <p:nvSpPr>
-              <p:cNvPr id="22" name="TextBox 21">
-                <a:extLst>
-                  <a:ext uri="{FF2B5EF4-FFF2-40B4-BE49-F238E27FC236}">
-                    <a16:creationId xmlns:a16="http://schemas.microsoft.com/office/drawing/2014/main" id="{6F4FF86A-A17E-B9D7-ABE0-BE6F2E719FFE}"/>
-                  </a:ext>
-                </a:extLst>
-              </p:cNvPr>
-              <p:cNvSpPr txBox="1"/>
-              <p:nvPr/>
-            </p:nvSpPr>
-            <p:spPr>
-              <a:xfrm>
-                <a:off x="108485" y="501899"/>
-                <a:ext cx="290464" cy="307777"/>
-              </a:xfrm>
-              <a:prstGeom prst="rect">
-                <a:avLst/>
-              </a:prstGeom>
-              <a:noFill/>
-            </p:spPr>
-            <p:txBody>
-              <a:bodyPr wrap="none" rtlCol="0">
-                <a:spAutoFit/>
-              </a:bodyPr>
-              <a:lstStyle/>
-              <a:p>
-                <a:r>
-                  <a:rPr lang="en-US" sz="1400" dirty="0"/>
-                  <a:t>A</a:t>
-                </a:r>
-              </a:p>
-            </p:txBody>
-          </p:sp>
-          <p:sp>
-            <p:nvSpPr>
-              <p:cNvPr id="23" name="TextBox 22">
-                <a:extLst>
-                  <a:ext uri="{FF2B5EF4-FFF2-40B4-BE49-F238E27FC236}">
-                    <a16:creationId xmlns:a16="http://schemas.microsoft.com/office/drawing/2014/main" id="{EA7D42A7-6CFF-DE1C-F2E6-804F3B56CD16}"/>
-                  </a:ext>
-                </a:extLst>
-              </p:cNvPr>
-              <p:cNvSpPr txBox="1"/>
-              <p:nvPr/>
-            </p:nvSpPr>
-            <p:spPr>
-              <a:xfrm>
-                <a:off x="3769644" y="501899"/>
-                <a:ext cx="293670" cy="307777"/>
-              </a:xfrm>
-              <a:prstGeom prst="rect">
-                <a:avLst/>
-              </a:prstGeom>
-              <a:noFill/>
-            </p:spPr>
-            <p:txBody>
-              <a:bodyPr wrap="none" rtlCol="0">
-                <a:spAutoFit/>
-              </a:bodyPr>
-              <a:lstStyle/>
-              <a:p>
-                <a:r>
-                  <a:rPr lang="en-US" sz="1400" dirty="0"/>
-                  <a:t>B</a:t>
-                </a:r>
-              </a:p>
-            </p:txBody>
-          </p:sp>
-          <p:sp>
-            <p:nvSpPr>
-              <p:cNvPr id="25" name="Rectangle 24">
-                <a:extLst>
-                  <a:ext uri="{FF2B5EF4-FFF2-40B4-BE49-F238E27FC236}">
-                    <a16:creationId xmlns:a16="http://schemas.microsoft.com/office/drawing/2014/main" id="{CCA6A6E0-06CB-0A23-1A07-F45483887B4F}"/>
-                  </a:ext>
-                </a:extLst>
-              </p:cNvPr>
-              <p:cNvSpPr/>
-              <p:nvPr/>
-            </p:nvSpPr>
-            <p:spPr>
-              <a:xfrm>
-                <a:off x="101895" y="517792"/>
-                <a:ext cx="3613494" cy="5321148"/>
-              </a:xfrm>
-              <a:prstGeom prst="rect">
-                <a:avLst/>
-              </a:prstGeom>
-              <a:noFill/>
-              <a:ln>
-                <a:solidFill>
-                  <a:schemeClr val="bg1">
-                    <a:lumMod val="85000"/>
-                  </a:schemeClr>
-                </a:solidFill>
-                <a:prstDash val="dash"/>
-              </a:ln>
-            </p:spPr>
-            <p:style>
-              <a:lnRef idx="2">
-                <a:schemeClr val="accent1">
-                  <a:shade val="15000"/>
-                </a:schemeClr>
-              </a:lnRef>
-              <a:fillRef idx="1">
-                <a:schemeClr val="accent1"/>
-              </a:fillRef>
-              <a:effectRef idx="0">
-                <a:schemeClr val="accent1"/>
-              </a:effectRef>
-              <a:fontRef idx="minor">
-                <a:schemeClr val="lt1"/>
-              </a:fontRef>
-            </p:style>
-            <p:txBody>
-              <a:bodyPr rtlCol="0" anchor="ctr"/>
-              <a:lstStyle/>
-              <a:p>
-                <a:pPr algn="ctr"/>
-                <a:endParaRPr lang="en-US"/>
-              </a:p>
-            </p:txBody>
-          </p:sp>
-          <p:sp>
-            <p:nvSpPr>
-              <p:cNvPr id="26" name="Rectangle 25">
-                <a:extLst>
-                  <a:ext uri="{FF2B5EF4-FFF2-40B4-BE49-F238E27FC236}">
-                    <a16:creationId xmlns:a16="http://schemas.microsoft.com/office/drawing/2014/main" id="{BD6673FD-C4E1-A0BD-6064-705E553102FC}"/>
-                  </a:ext>
-                </a:extLst>
-              </p:cNvPr>
-              <p:cNvSpPr/>
-              <p:nvPr/>
-            </p:nvSpPr>
-            <p:spPr>
-              <a:xfrm>
-                <a:off x="3756874" y="517792"/>
-                <a:ext cx="5836695" cy="2346959"/>
-              </a:xfrm>
-              <a:prstGeom prst="rect">
-                <a:avLst/>
-              </a:prstGeom>
-              <a:noFill/>
-              <a:ln>
-                <a:solidFill>
-                  <a:schemeClr val="bg1">
-                    <a:lumMod val="85000"/>
-                  </a:schemeClr>
-                </a:solidFill>
-                <a:prstDash val="dash"/>
-              </a:ln>
-            </p:spPr>
-            <p:style>
-              <a:lnRef idx="2">
-                <a:schemeClr val="accent1">
-                  <a:shade val="15000"/>
-                </a:schemeClr>
-              </a:lnRef>
-              <a:fillRef idx="1">
-                <a:schemeClr val="accent1"/>
-              </a:fillRef>
-              <a:effectRef idx="0">
-                <a:schemeClr val="accent1"/>
-              </a:effectRef>
-              <a:fontRef idx="minor">
-                <a:schemeClr val="lt1"/>
-              </a:fontRef>
-            </p:style>
-            <p:txBody>
-              <a:bodyPr rtlCol="0" anchor="ctr"/>
-              <a:lstStyle/>
-              <a:p>
-                <a:pPr algn="ctr"/>
-                <a:endParaRPr lang="en-US"/>
-              </a:p>
-            </p:txBody>
-          </p:sp>
-          <p:sp>
-            <p:nvSpPr>
-              <p:cNvPr id="27" name="Rectangle 26">
-                <a:extLst>
-                  <a:ext uri="{FF2B5EF4-FFF2-40B4-BE49-F238E27FC236}">
-                    <a16:creationId xmlns:a16="http://schemas.microsoft.com/office/drawing/2014/main" id="{C0F7E0AE-72F5-5F2A-1138-993DE8554C5F}"/>
-                  </a:ext>
-                </a:extLst>
-              </p:cNvPr>
-              <p:cNvSpPr/>
-              <p:nvPr/>
-            </p:nvSpPr>
-            <p:spPr>
-              <a:xfrm>
-                <a:off x="3756873" y="2903824"/>
-                <a:ext cx="5836695" cy="2935117"/>
-              </a:xfrm>
-              <a:prstGeom prst="rect">
-                <a:avLst/>
-              </a:prstGeom>
-              <a:noFill/>
-              <a:ln>
-                <a:solidFill>
-                  <a:schemeClr val="bg1">
-                    <a:lumMod val="85000"/>
-                  </a:schemeClr>
-                </a:solidFill>
-                <a:prstDash val="dash"/>
-              </a:ln>
-            </p:spPr>
-            <p:style>
-              <a:lnRef idx="2">
-                <a:schemeClr val="accent1">
-                  <a:shade val="15000"/>
-                </a:schemeClr>
-              </a:lnRef>
-              <a:fillRef idx="1">
-                <a:schemeClr val="accent1"/>
-              </a:fillRef>
-              <a:effectRef idx="0">
-                <a:schemeClr val="accent1"/>
-              </a:effectRef>
-              <a:fontRef idx="minor">
-                <a:schemeClr val="lt1"/>
-              </a:fontRef>
-            </p:style>
-            <p:txBody>
-              <a:bodyPr rtlCol="0" anchor="ctr"/>
-              <a:lstStyle/>
-              <a:p>
-                <a:pPr algn="ctr"/>
-                <a:endParaRPr lang="en-US"/>
-              </a:p>
-            </p:txBody>
-          </p:sp>
-          <p:sp>
-            <p:nvSpPr>
-              <p:cNvPr id="28" name="TextBox 27">
-                <a:extLst>
-                  <a:ext uri="{FF2B5EF4-FFF2-40B4-BE49-F238E27FC236}">
-                    <a16:creationId xmlns:a16="http://schemas.microsoft.com/office/drawing/2014/main" id="{28F3054E-6DD1-01CE-0EFF-8EF255066B23}"/>
-                  </a:ext>
-                </a:extLst>
-              </p:cNvPr>
-              <p:cNvSpPr txBox="1"/>
-              <p:nvPr/>
-            </p:nvSpPr>
-            <p:spPr>
-              <a:xfrm>
-                <a:off x="3769644" y="2925282"/>
-                <a:ext cx="309700" cy="307777"/>
-              </a:xfrm>
-              <a:prstGeom prst="rect">
-                <a:avLst/>
-              </a:prstGeom>
-              <a:noFill/>
-            </p:spPr>
-            <p:txBody>
-              <a:bodyPr wrap="none" rtlCol="0">
-                <a:spAutoFit/>
-              </a:bodyPr>
-              <a:lstStyle/>
-              <a:p>
-                <a:r>
-                  <a:rPr lang="en-US" sz="1400" dirty="0"/>
-                  <a:t>C</a:t>
-                </a:r>
-              </a:p>
-            </p:txBody>
-          </p:sp>
-          <p:sp>
-            <p:nvSpPr>
-              <p:cNvPr id="29" name="Rectangle 28">
-                <a:extLst>
-                  <a:ext uri="{FF2B5EF4-FFF2-40B4-BE49-F238E27FC236}">
-                    <a16:creationId xmlns:a16="http://schemas.microsoft.com/office/drawing/2014/main" id="{EB6ABCBF-362E-1AFC-40C7-20E7592AB048}"/>
-                  </a:ext>
-                </a:extLst>
-              </p:cNvPr>
-              <p:cNvSpPr/>
-              <p:nvPr/>
-            </p:nvSpPr>
-            <p:spPr>
-              <a:xfrm>
-                <a:off x="9635054" y="517792"/>
-                <a:ext cx="2186045" cy="5321148"/>
-              </a:xfrm>
-              <a:prstGeom prst="rect">
-                <a:avLst/>
-              </a:prstGeom>
-              <a:noFill/>
-              <a:ln>
-                <a:solidFill>
-                  <a:schemeClr val="bg1">
-                    <a:lumMod val="85000"/>
-                  </a:schemeClr>
-                </a:solidFill>
-                <a:prstDash val="dash"/>
-              </a:ln>
-            </p:spPr>
-            <p:style>
-              <a:lnRef idx="2">
-                <a:schemeClr val="accent1">
-                  <a:shade val="15000"/>
-                </a:schemeClr>
-              </a:lnRef>
-              <a:fillRef idx="1">
-                <a:schemeClr val="accent1"/>
-              </a:fillRef>
-              <a:effectRef idx="0">
-                <a:schemeClr val="accent1"/>
-              </a:effectRef>
-              <a:fontRef idx="minor">
-                <a:schemeClr val="lt1"/>
-              </a:fontRef>
-            </p:style>
-            <p:txBody>
-              <a:bodyPr rtlCol="0" anchor="ctr"/>
-              <a:lstStyle/>
-              <a:p>
-                <a:pPr algn="ctr"/>
-                <a:endParaRPr lang="en-US"/>
-              </a:p>
-            </p:txBody>
-          </p:sp>
-          <p:sp>
-            <p:nvSpPr>
-              <p:cNvPr id="30" name="TextBox 29">
-                <a:extLst>
-                  <a:ext uri="{FF2B5EF4-FFF2-40B4-BE49-F238E27FC236}">
-                    <a16:creationId xmlns:a16="http://schemas.microsoft.com/office/drawing/2014/main" id="{CF239376-22FE-C990-7CA4-0AA9A0A34E67}"/>
-                  </a:ext>
-                </a:extLst>
-              </p:cNvPr>
-              <p:cNvSpPr txBox="1"/>
-              <p:nvPr/>
-            </p:nvSpPr>
-            <p:spPr>
-              <a:xfrm>
-                <a:off x="9644368" y="501899"/>
-                <a:ext cx="308098" cy="307777"/>
-              </a:xfrm>
-              <a:prstGeom prst="rect">
-                <a:avLst/>
-              </a:prstGeom>
-              <a:noFill/>
-            </p:spPr>
-            <p:txBody>
-              <a:bodyPr wrap="none" rtlCol="0">
-                <a:spAutoFit/>
-              </a:bodyPr>
-              <a:lstStyle/>
-              <a:p>
-                <a:r>
-                  <a:rPr lang="en-US" sz="1400" dirty="0"/>
-                  <a:t>D</a:t>
-                </a:r>
-              </a:p>
-            </p:txBody>
-          </p:sp>
         </p:grpSp>
         <p:pic>
           <p:nvPicPr>
-            <p:cNvPr id="3" name="Picture 2">
+            <p:cNvPr id="5" name="Picture 4">
               <a:extLst>
                 <a:ext uri="{FF2B5EF4-FFF2-40B4-BE49-F238E27FC236}">
-                  <a16:creationId xmlns:a16="http://schemas.microsoft.com/office/drawing/2014/main" id="{E77945B6-AC6E-3B02-5239-9E39F9580F69}"/>
+                  <a16:creationId xmlns:a16="http://schemas.microsoft.com/office/drawing/2014/main" id="{A76499FF-5E3D-931C-29A0-1BFADA21200B}"/>
+                </a:ext>
+              </a:extLst>
+            </p:cNvPr>
+            <p:cNvPicPr>
+              <a:picLocks noChangeAspect="1"/>
+            </p:cNvPicPr>
+            <p:nvPr/>
+          </p:nvPicPr>
+          <p:blipFill>
+            <a:blip r:embed="rId6"/>
+            <a:stretch>
+              <a:fillRect/>
+            </a:stretch>
+          </p:blipFill>
+          <p:spPr>
+            <a:xfrm>
+              <a:off x="6787567" y="848749"/>
+              <a:ext cx="2750274" cy="1922645"/>
+            </a:xfrm>
+            <a:prstGeom prst="rect">
+              <a:avLst/>
+            </a:prstGeom>
+          </p:spPr>
+        </p:pic>
+        <p:pic>
+          <p:nvPicPr>
+            <p:cNvPr id="8" name="Picture 7">
+              <a:extLst>
+                <a:ext uri="{FF2B5EF4-FFF2-40B4-BE49-F238E27FC236}">
+                  <a16:creationId xmlns:a16="http://schemas.microsoft.com/office/drawing/2014/main" id="{70383A18-B421-1EAB-0830-5AEEA0FE1890}"/>
                 </a:ext>
               </a:extLst>
             </p:cNvPr>
@@ -3949,8 +3970,8 @@
           </p:blipFill>
           <p:spPr>
             <a:xfrm>
-              <a:off x="3816332" y="3233059"/>
-              <a:ext cx="5723904" cy="2483958"/>
+              <a:off x="3805742" y="848750"/>
+              <a:ext cx="2979462" cy="1922644"/>
             </a:xfrm>
             <a:prstGeom prst="rect">
               <a:avLst/>
